--- a/examples/personal-thinking-system/run/slides/s05-close/deliverables/slide.pptx
+++ b/examples/personal-thinking-system/run/slides/s05-close/deliverables/slide.pptx
@@ -503,7 +503,7 @@
             <a:r>
               <a:rPr lang="en-US" dirty="0"/>
               <a:t>[SlidePoise sources]
-Generated target visual: /Users/henry/Codes/AI_slide_drafting/output/showcase-revisions/personal-v2-authoring/slides/s05-close/work/accepted-slide.png</a:t>
+Generated target visual: /Users/henry/Codes/AI_slide_drafting/examples/personal-thinking-system/run/slides/s05-close/work/accepted-slide.png</a:t>
             </a:r>
             <a:endParaRPr lang="en-US" dirty="0"/>
           </a:p>
@@ -935,7 +935,7 @@
         </p:nvSpPr>
         <p:spPr>
           <a:xfrm>
-            <a:off x="1013460" y="571500"/>
+            <a:off x="1013460" y="640080"/>
             <a:ext cx="6560820" cy="1463040"/>
           </a:xfrm>
           <a:prstGeom prst="rect">
@@ -958,17 +958,17 @@
               <a:defRPr spc="0"/>
             </a:pPr>
             <a:r>
-              <a:rPr lang="en-US" sz="10050" dirty="0" spc="0">
+              <a:rPr lang="en-US" sz="8600" dirty="0" spc="0">
                 <a:solidFill>
                   <a:srgbClr val="242321"/>
                 </a:solidFill>
-                <a:latin typeface="Bodoni 72" pitchFamily="34" charset="0"/>
-                <a:ea typeface="Bodoni 72" pitchFamily="34" charset="-122"/>
-                <a:cs typeface="Bodoni 72" pitchFamily="34" charset="-120"/>
+                <a:latin typeface="Georgia" pitchFamily="34" charset="0"/>
+                <a:ea typeface="Georgia" pitchFamily="34" charset="-122"/>
+                <a:cs typeface="Georgia" pitchFamily="34" charset="-120"/>
               </a:rPr>
               <a:t>The point of</a:t>
             </a:r>
-            <a:endParaRPr lang="en-US" sz="10050" dirty="0" spc="0"/>
+            <a:endParaRPr lang="en-US" sz="8600" dirty="0" spc="0"/>
           </a:p>
         </p:txBody>
       </p:sp>
@@ -980,7 +980,7 @@
         </p:nvSpPr>
         <p:spPr>
           <a:xfrm>
-            <a:off x="1013460" y="1813560"/>
+            <a:off x="1013460" y="1889760"/>
             <a:ext cx="6560820" cy="1463040"/>
           </a:xfrm>
           <a:prstGeom prst="rect">
@@ -1003,17 +1003,17 @@
               <a:defRPr spc="0"/>
             </a:pPr>
             <a:r>
-              <a:rPr lang="en-US" sz="10050" dirty="0" spc="0">
+              <a:rPr lang="en-US" sz="8600" dirty="0" spc="0">
                 <a:solidFill>
                   <a:srgbClr val="242321"/>
                 </a:solidFill>
-                <a:latin typeface="Bodoni 72" pitchFamily="34" charset="0"/>
-                <a:ea typeface="Bodoni 72" pitchFamily="34" charset="-122"/>
-                <a:cs typeface="Bodoni 72" pitchFamily="34" charset="-120"/>
+                <a:latin typeface="Georgia" pitchFamily="34" charset="0"/>
+                <a:ea typeface="Georgia" pitchFamily="34" charset="-122"/>
+                <a:cs typeface="Georgia" pitchFamily="34" charset="-120"/>
               </a:rPr>
               <a:t>view is still</a:t>
             </a:r>
-            <a:endParaRPr lang="en-US" sz="10050" dirty="0" spc="0"/>
+            <a:endParaRPr lang="en-US" sz="8600" dirty="0" spc="0"/>
           </a:p>
         </p:txBody>
       </p:sp>
@@ -1025,7 +1025,7 @@
         </p:nvSpPr>
         <p:spPr>
           <a:xfrm>
-            <a:off x="1013460" y="2895600"/>
+            <a:off x="1013460" y="2964180"/>
             <a:ext cx="6560820" cy="1546860"/>
           </a:xfrm>
           <a:prstGeom prst="rect">
@@ -1048,17 +1048,17 @@
               <a:defRPr spc="0"/>
             </a:pPr>
             <a:r>
-              <a:rPr lang="en-US" sz="10050" dirty="0" spc="0">
+              <a:rPr lang="en-US" sz="8600" dirty="0" spc="0">
                 <a:solidFill>
                   <a:srgbClr val="242321"/>
                 </a:solidFill>
-                <a:latin typeface="Bodoni 72" pitchFamily="34" charset="0"/>
-                <a:ea typeface="Bodoni 72" pitchFamily="34" charset="-122"/>
-                <a:cs typeface="Bodoni 72" pitchFamily="34" charset="-120"/>
+                <a:latin typeface="Georgia" pitchFamily="34" charset="0"/>
+                <a:ea typeface="Georgia" pitchFamily="34" charset="-122"/>
+                <a:cs typeface="Georgia" pitchFamily="34" charset="-120"/>
               </a:rPr>
               <a:t>yours.</a:t>
             </a:r>
-            <a:endParaRPr lang="en-US" sz="10050" dirty="0" spc="0"/>
+            <a:endParaRPr lang="en-US" sz="8600" dirty="0" spc="0"/>
           </a:p>
         </p:txBody>
       </p:sp>
